--- a/carpentry/intake-142/PowerPoint/Day-09_2026-11-10_Week-3.pptx
+++ b/carpentry/intake-142/PowerPoint/Day-09_2026-11-10_Week-3.pptx
@@ -695,7 +695,7 @@
           <a:p/>
           <a:p>
             <a:r>
-              <a:t>Open the textbook to pages 67–70. Repeated pieces suggest multiplication: we want several copies of the same length. Equal sharing suggests division: we want the length of one share. Dividing a total length by a specified piece length asks a different question: how many such pieces fit? Which situation describes a centre line? Equal sharing into two halves. We will connect these meanings to 4A questions 16–17, 4B questions 4–5, and 4C question 5.</a:t>
+              <a:t>Open the textbook to pages 100–107. Repeated pieces suggest multiplication: we want several copies of the same length. Equal sharing suggests division: we want the length of one share. Dividing a total length by a specified piece length asks a different question: how many such pieces fit? Which situation describes a centre line? Equal sharing into two halves. We will connect these meanings to 4A questions 16–17, 4B questions 4–5, and 4C question 5.</a:t>
             </a:r>
           </a:p>
         </p:txBody>
@@ -999,7 +999,7 @@
           <a:p/>
           <a:p>
             <a:r>
-              <a:t>Example 4.12 on page 68 divides a stock length by a piece length. Follow which value is the total and which is the size of one piece. The quotient tells us how many piece lengths fit. If it is not a whole number, what can we actually make? Only the complete pieces allowed by the whole-number part; a partial quotient is not another complete piece. To find the offcut, multiply the number of complete pieces by the piece length, then subtract from the stock length. This keeps the piece count distinct from the remaining length.</a:t>
+              <a:t>Example 4.12 on page 101 divides a stock length by a piece length. Follow which value is the total and which is the size of one piece. The quotient tells us how many piece lengths fit. If it is not a whole number, what can we actually make? Only the complete pieces allowed by the whole-number part; a partial quotient is not another complete piece. To find the offcut, multiply the number of complete pieces by the piece length, then subtract from the stock length. This keeps the piece count distinct from the remaining length.</a:t>
             </a:r>
           </a:p>
         </p:txBody>
@@ -1075,7 +1075,7 @@
           <a:p/>
           <a:p>
             <a:r>
-              <a:t>Page 68 shows how exact fraction entry supports the piece-count and offcut calculation. Enter the stock and piece dimensions as written, using the documented fraction sequence for your calculator. Avoid rounding them to short decimals before division, because that could shift a result near a whole-piece boundary. What value goes into the offcut calculation? The number of complete pieces multiplied by the exact piece length. Then subtract that used length from the stock. Read the final display as a length and compare it with one full piece: an offcut smaller than a piece cannot supply another complete piece.</a:t>
+              <a:t>Page 101 shows how exact fraction entry supports the piece-count and offcut calculation. Enter the stock and piece dimensions as written, using the documented fraction sequence for your calculator. Avoid rounding them to short decimals before division, because that could shift a result near a whole-piece boundary. What value goes into the offcut calculation? The number of complete pieces multiplied by the exact piece length. Then subtract that used length from the stock. Read the final display as a length and compare it with one full piece: an offcut smaller than a piece cannot supply another complete piece.</a:t>
             </a:r>
           </a:p>
         </p:txBody>
@@ -2239,7 +2239,7 @@
           <a:p/>
           <a:p>
             <a:r>
-              <a:t>This block brings addition, subtraction, multiplication, and division together. The first decision is choosing the operation that fits the situation; the second is using the correct fraction procedure. What makes a correction useful? It identifies the original error and explains why the revised method works. We will use the textbook on pages 64–70, questions 14–17 in 4A, and the missing-dimension drawings in 4C questions 1–3. Your final answers should be in simplest form, with working that another person can follow.</a:t>
+              <a:t>This block brings addition, subtraction, multiplication, and division together. The first decision is choosing the operation that fits the situation; the second is using the correct fraction procedure. What makes a correction useful? It identifies the original error and explains why the revised method works. We will use the textbook on pages 97–107, questions 14–17 in 4A, and the missing-dimension drawings in 4C questions 1–3. Your final answers should be in simplest form, with working that another person can follow.</a:t>
             </a:r>
           </a:p>
         </p:txBody>
@@ -2543,7 +2543,7 @@
           <a:p/>
           <a:p>
             <a:r>
-              <a:t>Example 4.8 on page 64 shows a stack of labelled plates. Each layer contributes its thickness to the total, so addition is the appropriate operation. Read the labels, then follow the common-denominator calculation. Why are equal-sized fractional units needed? We must count the thicknesses together in one consistent unit. The drawing helps diagnose an operation error: multiplying the layer thicknesses would not represent adding layers to a stack. Before evaluating any numbers, describe in words how the physical arrangement creates the total being asked for.</a:t>
+              <a:t>Example 4.8 on page 97 shows a stack of labelled plates. Each layer contributes its thickness to the total, so addition is the appropriate operation. Read the labels, then follow the common-denominator calculation. Why are equal-sized fractional units needed? We must count the thicknesses together in one consistent unit. The drawing helps diagnose an operation error: multiplying the layer thicknesses would not represent adding layers to a stack. Before evaluating any numbers, describe in words how the physical arrangement creates the total being asked for.</a:t>
             </a:r>
           </a:p>
         </p:txBody>
@@ -2619,7 +2619,7 @@
           <a:p/>
           <a:p>
             <a:r>
-              <a:t>Use the calculator sequence on page 64 to check a written fraction method after the paper attempt. Enter the same values and operation that appear in your equation. If the calculator result differs, do not immediately replace your work. Compare the chosen operation, the fraction entry, and any mixed-number display conversion. What can a calculator verify reliably? The arithmetic of what you entered. It cannot decide whether a stack requires addition or whether you copied the correct dimension from a drawing; those decisions still come from your interpretation.</a:t>
+              <a:t>Use the calculator sequence on page 97 to check a written fraction method after the paper attempt. Enter the same values and operation that appear in your equation. If the calculator result differs, do not immediately replace your work. Compare the chosen operation, the fraction entry, and any mixed-number display conversion. What can a calculator verify reliably? The arithmetic of what you entered. It cannot decide whether a stack requires addition or whether you copied the correct dimension from a drawing; those decisions still come from your interpretation.</a:t>
             </a:r>
           </a:p>
         </p:txBody>
@@ -5593,7 +5593,7 @@
                 </a:solidFill>
                 <a:latin typeface="Arial"/>
               </a:rPr>
-              <a:t>Textbook Chapter 4 pp.67–70</a:t>
+              <a:t>Textbook Chapter 4 pp.100–107</a:t>
             </a:r>
           </a:p>
         </p:txBody>
@@ -6351,7 +6351,7 @@
                 </a:solidFill>
                 <a:latin typeface="Arial"/>
               </a:rPr>
-              <a:t>Textbook Chapter 4 pp.67–70</a:t>
+              <a:t>Textbook Chapter 4 pp.100–107</a:t>
             </a:r>
           </a:p>
         </p:txBody>
@@ -6551,7 +6551,7 @@
                 </a:solidFill>
                 <a:latin typeface="Arial"/>
               </a:rPr>
-              <a:t>Resources: Exercise Book 4A Q16–17 (p.26); 4B Q4–5 (p.27); 4C Q5 (p.30)</a:t>
+              <a:t>Resources: Exercise Book 4A Q16–17 (p.36); 4B Q4–5 (p.37); 4C Q5 (p.40)</a:t>
             </a:r>
           </a:p>
         </p:txBody>
@@ -7165,7 +7165,7 @@
                 </a:solidFill>
                 <a:latin typeface="Arial"/>
               </a:rPr>
-              <a:t>Textbook Chapter 4 pp.67–70</a:t>
+              <a:t>Textbook Chapter 4 pp.100–107</a:t>
             </a:r>
           </a:p>
         </p:txBody>
@@ -7921,7 +7921,7 @@
                 </a:solidFill>
                 <a:latin typeface="Arial"/>
               </a:rPr>
-              <a:t>Textbook Chapter 4 pp.67–70</a:t>
+              <a:t>Textbook Chapter 4 pp.100–107</a:t>
             </a:r>
           </a:p>
         </p:txBody>
@@ -8655,7 +8655,7 @@
                 </a:solidFill>
                 <a:latin typeface="Arial"/>
               </a:rPr>
-              <a:t>Textbook Chapter 4 pp.67–70</a:t>
+              <a:t>Textbook Chapter 4 pp.100–107</a:t>
             </a:r>
           </a:p>
         </p:txBody>
@@ -8855,7 +8855,7 @@
                 </a:solidFill>
                 <a:latin typeface="Arial"/>
               </a:rPr>
-              <a:t>Resources: Exercise Book 4A Q16–17 (p.26); 4B Q4–5 (p.27); 4C Q5 (p.30)</a:t>
+              <a:t>Resources: Exercise Book 4A Q16–17 (p.36); 4B Q4–5 (p.37); 4C Q5 (p.40)</a:t>
             </a:r>
           </a:p>
         </p:txBody>
@@ -9469,7 +9469,7 @@
                 </a:solidFill>
                 <a:latin typeface="Arial"/>
               </a:rPr>
-              <a:t>Textbook Chapter 4 pp.67–70</a:t>
+              <a:t>Textbook Chapter 4 pp.100–107</a:t>
             </a:r>
           </a:p>
         </p:txBody>
@@ -10245,7 +10245,7 @@
                 </a:solidFill>
                 <a:latin typeface="Arial"/>
               </a:rPr>
-              <a:t>Textbook Chapter 4 pp.67–70</a:t>
+              <a:t>Textbook Chapter 4 pp.100–107</a:t>
             </a:r>
           </a:p>
         </p:txBody>
@@ -11204,7 +11204,7 @@
                 </a:solidFill>
                 <a:latin typeface="Arial"/>
               </a:rPr>
-              <a:t>Textbook Chapter 4 pp.67–70</a:t>
+              <a:t>Textbook Chapter 4 pp.100–107</a:t>
             </a:r>
           </a:p>
         </p:txBody>
@@ -11915,7 +11915,7 @@
                 </a:solidFill>
                 <a:latin typeface="Arial"/>
               </a:rPr>
-              <a:t>Textbook Chapter 4 pp.67–70</a:t>
+              <a:t>Textbook Chapter 4 pp.100–107</a:t>
             </a:r>
           </a:p>
         </p:txBody>
@@ -12601,7 +12601,7 @@
                 </a:solidFill>
                 <a:latin typeface="Arial"/>
               </a:rPr>
-              <a:t>Textbook Chapter 4 pp.67–70</a:t>
+              <a:t>Textbook Chapter 4 pp.100–107</a:t>
             </a:r>
           </a:p>
         </p:txBody>
@@ -12801,7 +12801,7 @@
                 </a:solidFill>
                 <a:latin typeface="Arial"/>
               </a:rPr>
-              <a:t>Resources: Exercise Book 4A Q16–17 (p.26); 4B Q4–5 (p.27); 4C Q5 (p.30)</a:t>
+              <a:t>Resources: Exercise Book 4A Q16–17 (p.36); 4B Q4–5 (p.37); 4C Q5 (p.40)</a:t>
             </a:r>
           </a:p>
         </p:txBody>
@@ -16767,7 +16767,7 @@
                 </a:solidFill>
                 <a:latin typeface="Arial"/>
               </a:rPr>
-              <a:t>Textbook Chapter 4 pp.67–70</a:t>
+              <a:t>Textbook Chapter 4 pp.100–107</a:t>
             </a:r>
           </a:p>
         </p:txBody>
@@ -17478,7 +17478,7 @@
                 </a:solidFill>
                 <a:latin typeface="Arial"/>
               </a:rPr>
-              <a:t>Textbook Chapter 4 pp.67–70</a:t>
+              <a:t>Textbook Chapter 4 pp.100–107</a:t>
             </a:r>
           </a:p>
         </p:txBody>
@@ -18189,7 +18189,7 @@
                 </a:solidFill>
                 <a:latin typeface="Arial"/>
               </a:rPr>
-              <a:t>Textbook Chapter 4 pp.67–70</a:t>
+              <a:t>Textbook Chapter 4 pp.100–107</a:t>
             </a:r>
           </a:p>
         </p:txBody>
@@ -18389,7 +18389,7 @@
                 </a:solidFill>
                 <a:latin typeface="Arial"/>
               </a:rPr>
-              <a:t>Resources: Exercise Book 4A Q16–17 (p.26); 4B Q4–5 (p.27); 4C Q5 (p.30)</a:t>
+              <a:t>Resources: Exercise Book 4A Q16–17 (p.36); 4B Q4–5 (p.37); 4C Q5 (p.40)</a:t>
             </a:r>
           </a:p>
         </p:txBody>
@@ -19668,7 +19668,7 @@
                 </a:solidFill>
                 <a:latin typeface="Arial"/>
               </a:rPr>
-              <a:t>Textbook Chapter 4 pp.64–70</a:t>
+              <a:t>Textbook Chapter 4 pp.97–107</a:t>
             </a:r>
           </a:p>
         </p:txBody>
@@ -19868,7 +19868,7 @@
                 </a:solidFill>
                 <a:latin typeface="Arial"/>
               </a:rPr>
-              <a:t>Textbook Chapter 4 pp.64–70</a:t>
+              <a:t>Textbook Chapter 4 pp.97–107</a:t>
             </a:r>
           </a:p>
         </p:txBody>
@@ -19916,7 +19916,7 @@
                 </a:solidFill>
                 <a:latin typeface="Arial"/>
               </a:rPr>
-              <a:t>Exercise Book 4A Q14–17 (p.26); 4C Q1–3 (p.29)</a:t>
+              <a:t>Exercise Book 4A Q14–17 (p.36); 4C Q1–3 (p.39)</a:t>
             </a:r>
           </a:p>
         </p:txBody>
@@ -20578,7 +20578,7 @@
                 </a:solidFill>
                 <a:latin typeface="Arial"/>
               </a:rPr>
-              <a:t>Textbook Chapter 4 pp.64–70</a:t>
+              <a:t>Textbook Chapter 4 pp.97–107</a:t>
             </a:r>
           </a:p>
         </p:txBody>
@@ -20778,7 +20778,7 @@
                 </a:solidFill>
                 <a:latin typeface="Arial"/>
               </a:rPr>
-              <a:t>Resources: Exercise Book 4A Q14–17 (p.26); 4C Q1–3 (p.29)</a:t>
+              <a:t>Resources: Exercise Book 4A Q14–17 (p.36); 4C Q1–3 (p.39)</a:t>
             </a:r>
           </a:p>
         </p:txBody>
@@ -21527,7 +21527,7 @@
                 </a:solidFill>
                 <a:latin typeface="Arial"/>
               </a:rPr>
-              <a:t>Textbook Chapter 4 pp.64–70</a:t>
+              <a:t>Textbook Chapter 4 pp.97–107</a:t>
             </a:r>
           </a:p>
         </p:txBody>
@@ -22772,7 +22772,7 @@
                 </a:solidFill>
                 <a:latin typeface="Arial"/>
               </a:rPr>
-              <a:t>Textbook Chapter 4 pp.64–70</a:t>
+              <a:t>Textbook Chapter 4 pp.97–107</a:t>
             </a:r>
           </a:p>
         </p:txBody>
@@ -24683,7 +24683,7 @@
                 </a:solidFill>
                 <a:latin typeface="Arial"/>
               </a:rPr>
-              <a:t>Textbook  |  page 64</a:t>
+              <a:t>Textbook  |  page 97</a:t>
             </a:r>
           </a:p>
         </p:txBody>
@@ -24731,7 +24731,7 @@
                 </a:solidFill>
                 <a:latin typeface="Arial"/>
               </a:rPr>
-              <a:t>Textbook Chapter 4 pp.64–70</a:t>
+              <a:t>Textbook Chapter 4 pp.97–107</a:t>
             </a:r>
           </a:p>
         </p:txBody>
@@ -24803,7 +24803,7 @@
                 </a:solidFill>
                 <a:latin typeface="Arial"/>
               </a:rPr>
-              <a:t>Textbook p.64 · Example 4.8: use equal-sized fractions to add a stack.</a:t>
+              <a:t>Textbook p.97 · Example 4.8: use equal-sized fractions to add a stack.</a:t>
             </a:r>
           </a:p>
         </p:txBody>
@@ -25372,7 +25372,7 @@
                 </a:solidFill>
                 <a:latin typeface="Arial"/>
               </a:rPr>
-              <a:t>Textbook Chapter 4 pp.67–70</a:t>
+              <a:t>Textbook Chapter 4 pp.100–107</a:t>
             </a:r>
           </a:p>
         </p:txBody>
@@ -25572,7 +25572,7 @@
                 </a:solidFill>
                 <a:latin typeface="Arial"/>
               </a:rPr>
-              <a:t>Textbook Chapter 4 pp.67–70</a:t>
+              <a:t>Textbook Chapter 4 pp.100–107</a:t>
             </a:r>
           </a:p>
         </p:txBody>
@@ -25620,7 +25620,7 @@
                 </a:solidFill>
                 <a:latin typeface="Arial"/>
               </a:rPr>
-              <a:t>Exercise Book 4A Q16–17 (p.26); 4B Q4–5 (p.27); 4C Q5 (p.30)</a:t>
+              <a:t>Exercise Book 4A Q16–17 (p.36); 4B Q4–5 (p.37); 4C Q5 (p.40)</a:t>
             </a:r>
           </a:p>
         </p:txBody>
@@ -26234,7 +26234,7 @@
                 </a:solidFill>
                 <a:latin typeface="Arial"/>
               </a:rPr>
-              <a:t>Textbook  |  page 64</a:t>
+              <a:t>Textbook  |  page 97</a:t>
             </a:r>
           </a:p>
         </p:txBody>
@@ -26282,7 +26282,7 @@
                 </a:solidFill>
                 <a:latin typeface="Arial"/>
               </a:rPr>
-              <a:t>Textbook Chapter 4 pp.64–70</a:t>
+              <a:t>Textbook Chapter 4 pp.97–107</a:t>
             </a:r>
           </a:p>
         </p:txBody>
@@ -26354,7 +26354,7 @@
                 </a:solidFill>
                 <a:latin typeface="Arial"/>
               </a:rPr>
-              <a:t>Textbook p.64 · Check the written fraction method on the chosen calculator.</a:t>
+              <a:t>Textbook p.97 · Check the written fraction method on the chosen calculator.</a:t>
             </a:r>
           </a:p>
         </p:txBody>
@@ -26968,7 +26968,7 @@
                 </a:solidFill>
                 <a:latin typeface="Arial"/>
               </a:rPr>
-              <a:t>Textbook Chapter 4 pp.64–70</a:t>
+              <a:t>Textbook Chapter 4 pp.97–107</a:t>
             </a:r>
           </a:p>
         </p:txBody>
@@ -27726,7 +27726,7 @@
                 </a:solidFill>
                 <a:latin typeface="Arial"/>
               </a:rPr>
-              <a:t>Textbook Chapter 4 pp.64–70</a:t>
+              <a:t>Textbook Chapter 4 pp.97–107</a:t>
             </a:r>
           </a:p>
         </p:txBody>
@@ -27926,7 +27926,7 @@
                 </a:solidFill>
                 <a:latin typeface="Arial"/>
               </a:rPr>
-              <a:t>Resources: Exercise Book 4A Q14–17 (p.26); 4C Q1–3 (p.29)</a:t>
+              <a:t>Resources: Exercise Book 4A Q14–17 (p.36); 4C Q1–3 (p.39)</a:t>
             </a:r>
           </a:p>
         </p:txBody>
@@ -28540,7 +28540,7 @@
                 </a:solidFill>
                 <a:latin typeface="Arial"/>
               </a:rPr>
-              <a:t>Textbook Chapter 4 pp.64–70</a:t>
+              <a:t>Textbook Chapter 4 pp.97–107</a:t>
             </a:r>
           </a:p>
         </p:txBody>
@@ -29296,7 +29296,7 @@
                 </a:solidFill>
                 <a:latin typeface="Arial"/>
               </a:rPr>
-              <a:t>Textbook Chapter 4 pp.64–70</a:t>
+              <a:t>Textbook Chapter 4 pp.97–107</a:t>
             </a:r>
           </a:p>
         </p:txBody>
@@ -30030,7 +30030,7 @@
                 </a:solidFill>
                 <a:latin typeface="Arial"/>
               </a:rPr>
-              <a:t>Textbook Chapter 4 pp.64–70</a:t>
+              <a:t>Textbook Chapter 4 pp.97–107</a:t>
             </a:r>
           </a:p>
         </p:txBody>
@@ -30230,7 +30230,7 @@
                 </a:solidFill>
                 <a:latin typeface="Arial"/>
               </a:rPr>
-              <a:t>Resources: Exercise Book 4A Q14–17 (p.26); 4C Q1–3 (p.29)</a:t>
+              <a:t>Resources: Exercise Book 4A Q14–17 (p.36); 4C Q1–3 (p.39)</a:t>
             </a:r>
           </a:p>
         </p:txBody>
@@ -30844,7 +30844,7 @@
                 </a:solidFill>
                 <a:latin typeface="Arial"/>
               </a:rPr>
-              <a:t>Textbook Chapter 4 pp.64–70</a:t>
+              <a:t>Textbook Chapter 4 pp.97–107</a:t>
             </a:r>
           </a:p>
         </p:txBody>
@@ -31620,7 +31620,7 @@
                 </a:solidFill>
                 <a:latin typeface="Arial"/>
               </a:rPr>
-              <a:t>Textbook Chapter 4 pp.64–70</a:t>
+              <a:t>Textbook Chapter 4 pp.97–107</a:t>
             </a:r>
           </a:p>
         </p:txBody>
@@ -32579,7 +32579,7 @@
                 </a:solidFill>
                 <a:latin typeface="Arial"/>
               </a:rPr>
-              <a:t>Textbook Chapter 4 pp.64–70</a:t>
+              <a:t>Textbook Chapter 4 pp.97–107</a:t>
             </a:r>
           </a:p>
         </p:txBody>
@@ -33290,7 +33290,7 @@
                 </a:solidFill>
                 <a:latin typeface="Arial"/>
               </a:rPr>
-              <a:t>Textbook Chapter 4 pp.64–70</a:t>
+              <a:t>Textbook Chapter 4 pp.97–107</a:t>
             </a:r>
           </a:p>
         </p:txBody>
@@ -33976,7 +33976,7 @@
                 </a:solidFill>
                 <a:latin typeface="Arial"/>
               </a:rPr>
-              <a:t>Textbook Chapter 4 pp.67–70</a:t>
+              <a:t>Textbook Chapter 4 pp.100–107</a:t>
             </a:r>
           </a:p>
         </p:txBody>
@@ -34176,7 +34176,7 @@
                 </a:solidFill>
                 <a:latin typeface="Arial"/>
               </a:rPr>
-              <a:t>Resources: Exercise Book 4A Q16–17 (p.26); 4B Q4–5 (p.27); 4C Q5 (p.30)</a:t>
+              <a:t>Resources: Exercise Book 4A Q16–17 (p.36); 4B Q4–5 (p.37); 4C Q5 (p.40)</a:t>
             </a:r>
           </a:p>
         </p:txBody>
@@ -34790,7 +34790,7 @@
                 </a:solidFill>
                 <a:latin typeface="Arial"/>
               </a:rPr>
-              <a:t>Textbook Chapter 4 pp.64–70</a:t>
+              <a:t>Textbook Chapter 4 pp.97–107</a:t>
             </a:r>
           </a:p>
         </p:txBody>
@@ -34990,7 +34990,7 @@
                 </a:solidFill>
                 <a:latin typeface="Arial"/>
               </a:rPr>
-              <a:t>Resources: Exercise Book 4A Q14–17 (p.26); 4C Q1–3 (p.29)</a:t>
+              <a:t>Resources: Exercise Book 4A Q14–17 (p.36); 4C Q1–3 (p.39)</a:t>
             </a:r>
           </a:p>
         </p:txBody>
@@ -35604,7 +35604,7 @@
                 </a:solidFill>
                 <a:latin typeface="Arial"/>
               </a:rPr>
-              <a:t>Textbook Chapter 4 pp.64–70</a:t>
+              <a:t>Textbook Chapter 4 pp.97–107</a:t>
             </a:r>
           </a:p>
         </p:txBody>
@@ -36315,7 +36315,7 @@
                 </a:solidFill>
                 <a:latin typeface="Arial"/>
               </a:rPr>
-              <a:t>Textbook Chapter 4 pp.64–70</a:t>
+              <a:t>Textbook Chapter 4 pp.97–107</a:t>
             </a:r>
           </a:p>
         </p:txBody>
@@ -37026,7 +37026,7 @@
                 </a:solidFill>
                 <a:latin typeface="Arial"/>
               </a:rPr>
-              <a:t>Textbook Chapter 4 pp.64–70</a:t>
+              <a:t>Textbook Chapter 4 pp.97–107</a:t>
             </a:r>
           </a:p>
         </p:txBody>
@@ -37737,7 +37737,7 @@
                 </a:solidFill>
                 <a:latin typeface="Arial"/>
               </a:rPr>
-              <a:t>Textbook Chapter 4 pp.64–70</a:t>
+              <a:t>Textbook Chapter 4 pp.97–107</a:t>
             </a:r>
           </a:p>
         </p:txBody>
@@ -38448,7 +38448,7 @@
                 </a:solidFill>
                 <a:latin typeface="Arial"/>
               </a:rPr>
-              <a:t>Textbook Chapter 4 pp.64–70</a:t>
+              <a:t>Textbook Chapter 4 pp.97–107</a:t>
             </a:r>
           </a:p>
         </p:txBody>
@@ -38648,7 +38648,7 @@
                 </a:solidFill>
                 <a:latin typeface="Arial"/>
               </a:rPr>
-              <a:t>Resources: Exercise Book 4A Q14–17 (p.26); 4C Q1–3 (p.29)</a:t>
+              <a:t>Resources: Exercise Book 4A Q14–17 (p.36); 4C Q1–3 (p.39)</a:t>
             </a:r>
           </a:p>
         </p:txBody>
@@ -39397,7 +39397,7 @@
                 </a:solidFill>
                 <a:latin typeface="Arial"/>
               </a:rPr>
-              <a:t>Textbook Chapter 4 pp.67–70</a:t>
+              <a:t>Textbook Chapter 4 pp.100–107</a:t>
             </a:r>
           </a:p>
         </p:txBody>
@@ -40642,7 +40642,7 @@
                 </a:solidFill>
                 <a:latin typeface="Arial"/>
               </a:rPr>
-              <a:t>Textbook Chapter 4 pp.67–70</a:t>
+              <a:t>Textbook Chapter 4 pp.100–107</a:t>
             </a:r>
           </a:p>
         </p:txBody>
@@ -42553,7 +42553,7 @@
                 </a:solidFill>
                 <a:latin typeface="Arial"/>
               </a:rPr>
-              <a:t>Textbook  |  page 68</a:t>
+              <a:t>Textbook  |  page 101</a:t>
             </a:r>
           </a:p>
         </p:txBody>
@@ -42601,7 +42601,7 @@
                 </a:solidFill>
                 <a:latin typeface="Arial"/>
               </a:rPr>
-              <a:t>Textbook Chapter 4 pp.67–70</a:t>
+              <a:t>Textbook Chapter 4 pp.100–107</a:t>
             </a:r>
           </a:p>
         </p:txBody>
@@ -42673,7 +42673,7 @@
                 </a:solidFill>
                 <a:latin typeface="Arial"/>
               </a:rPr>
-              <a:t>Textbook p.68 · Example 4.12: divide fractional lengths and count complete pieces.</a:t>
+              <a:t>Textbook p.101 · Example 4.12: divide fractional lengths and count complete pieces.</a:t>
             </a:r>
           </a:p>
         </p:txBody>
@@ -43239,7 +43239,7 @@
                 </a:solidFill>
                 <a:latin typeface="Arial"/>
               </a:rPr>
-              <a:t>Textbook  |  page 68</a:t>
+              <a:t>Textbook  |  page 101</a:t>
             </a:r>
           </a:p>
         </p:txBody>
@@ -43287,7 +43287,7 @@
                 </a:solidFill>
                 <a:latin typeface="Arial"/>
               </a:rPr>
-              <a:t>Textbook Chapter 4 pp.67–70</a:t>
+              <a:t>Textbook Chapter 4 pp.100–107</a:t>
             </a:r>
           </a:p>
         </p:txBody>
@@ -43359,7 +43359,7 @@
                 </a:solidFill>
                 <a:latin typeface="Arial"/>
               </a:rPr>
-              <a:t>Textbook p.68 · Exact fraction calculator entry for the pieces and offcut.</a:t>
+              <a:t>Textbook p.101 · Exact fraction calculator entry for the pieces and offcut.</a:t>
             </a:r>
           </a:p>
         </p:txBody>

--- a/carpentry/intake-142/PowerPoint/Day-09_2026-11-10_Week-3.pptx
+++ b/carpentry/intake-142/PowerPoint/Day-09_2026-11-10_Week-3.pptx
@@ -18662,6 +18662,104 @@
           </a:p>
         </p:txBody>
       </p:sp>
+      <p:sp>
+        <p:nvSpPr>
+          <p:cNvPr id="22" name="Play quiz W03-L03"/>
+          <p:cNvSpPr txBox="1"/>
+          <p:nvPr/>
+        </p:nvSpPr>
+        <p:spPr>
+          <a:xfrm>
+            <a:off x="6355080" y="6606540"/>
+            <a:ext cx="822960" cy="210312"/>
+          </a:xfrm>
+          <a:prstGeom prst="rect">
+            <a:avLst/>
+          </a:prstGeom>
+          <a:noFill/>
+        </p:spPr>
+        <p:txBody>
+          <a:bodyPr wrap="square" lIns="0" rIns="0" tIns="0" bIns="0" anchor="t">
+            <a:normAutofit fontScale="100000" lnSpcReduction="0"/>
+          </a:bodyPr>
+          <a:lstStyle/>
+          <a:p>
+            <a:pPr>
+              <a:spcBef>
+                <a:spcPts val="0"/>
+              </a:spcBef>
+              <a:spcAft>
+                <a:spcPts val="0"/>
+              </a:spcAft>
+              <a:defRPr sz="1000" b="0">
+                <a:solidFill>
+                  <a:srgbClr val="D0002B"/>
+                </a:solidFill>
+                <a:latin typeface="Arial"/>
+              </a:defRPr>
+            </a:pPr>
+            <a:r>
+              <a:rPr sz="1000">
+                <a:solidFill>
+                  <a:srgbClr val="F7F8FC"/>
+                </a:solidFill>
+                <a:latin typeface="Arial"/>
+                <a:hlinkClick r:id="rId8"/>
+              </a:rPr>
+              <a:t>Play quiz</a:t>
+            </a:r>
+          </a:p>
+        </p:txBody>
+      </p:sp>
+      <p:sp>
+        <p:nvSpPr>
+          <p:cNvPr id="23" name="Quiz PDF W03-L03"/>
+          <p:cNvSpPr txBox="1"/>
+          <p:nvPr/>
+        </p:nvSpPr>
+        <p:spPr>
+          <a:xfrm>
+            <a:off x="7296912" y="6606540"/>
+            <a:ext cx="1005840" cy="210312"/>
+          </a:xfrm>
+          <a:prstGeom prst="rect">
+            <a:avLst/>
+          </a:prstGeom>
+          <a:noFill/>
+        </p:spPr>
+        <p:txBody>
+          <a:bodyPr wrap="square" lIns="0" rIns="0" tIns="0" bIns="0" anchor="t">
+            <a:normAutofit fontScale="100000" lnSpcReduction="0"/>
+          </a:bodyPr>
+          <a:lstStyle/>
+          <a:p>
+            <a:pPr>
+              <a:spcBef>
+                <a:spcPts val="0"/>
+              </a:spcBef>
+              <a:spcAft>
+                <a:spcPts val="0"/>
+              </a:spcAft>
+              <a:defRPr sz="1000" b="0">
+                <a:solidFill>
+                  <a:srgbClr val="D0002B"/>
+                </a:solidFill>
+                <a:latin typeface="Arial"/>
+              </a:defRPr>
+            </a:pPr>
+            <a:r>
+              <a:rPr sz="1000">
+                <a:solidFill>
+                  <a:srgbClr val="F7F8FC"/>
+                </a:solidFill>
+                <a:latin typeface="Arial"/>
+                <a:hlinkClick r:id="rId9"/>
+              </a:rPr>
+              <a:t>Quiz PDF</a:t>
+            </a:r>
+          </a:p>
+        </p:txBody>
+      </p:sp>
     </p:spTree>
   </p:cSld>
   <p:clrMapOvr>
@@ -38917,6 +39015,104 @@
                 <a:latin typeface="Arial"/>
               </a:rPr>
               <a:t>Day 09  •  2026-11-10  •  45</a:t>
+            </a:r>
+          </a:p>
+        </p:txBody>
+      </p:sp>
+      <p:sp>
+        <p:nvSpPr>
+          <p:cNvPr id="22" name="Play quiz W03-L04"/>
+          <p:cNvSpPr txBox="1"/>
+          <p:nvPr/>
+        </p:nvSpPr>
+        <p:spPr>
+          <a:xfrm>
+            <a:off x="6355080" y="6606540"/>
+            <a:ext cx="822960" cy="210312"/>
+          </a:xfrm>
+          <a:prstGeom prst="rect">
+            <a:avLst/>
+          </a:prstGeom>
+          <a:noFill/>
+        </p:spPr>
+        <p:txBody>
+          <a:bodyPr wrap="square" lIns="0" rIns="0" tIns="0" bIns="0" anchor="t">
+            <a:normAutofit fontScale="100000" lnSpcReduction="0"/>
+          </a:bodyPr>
+          <a:lstStyle/>
+          <a:p>
+            <a:pPr>
+              <a:spcBef>
+                <a:spcPts val="0"/>
+              </a:spcBef>
+              <a:spcAft>
+                <a:spcPts val="0"/>
+              </a:spcAft>
+              <a:defRPr sz="1000" b="0">
+                <a:solidFill>
+                  <a:srgbClr val="D0002B"/>
+                </a:solidFill>
+                <a:latin typeface="Arial"/>
+              </a:defRPr>
+            </a:pPr>
+            <a:r>
+              <a:rPr sz="1000">
+                <a:solidFill>
+                  <a:srgbClr val="F7F8FC"/>
+                </a:solidFill>
+                <a:latin typeface="Arial"/>
+                <a:hlinkClick r:id="rId8"/>
+              </a:rPr>
+              <a:t>Play quiz</a:t>
+            </a:r>
+          </a:p>
+        </p:txBody>
+      </p:sp>
+      <p:sp>
+        <p:nvSpPr>
+          <p:cNvPr id="23" name="Quiz PDF W03-L04"/>
+          <p:cNvSpPr txBox="1"/>
+          <p:nvPr/>
+        </p:nvSpPr>
+        <p:spPr>
+          <a:xfrm>
+            <a:off x="7296912" y="6606540"/>
+            <a:ext cx="1005840" cy="210312"/>
+          </a:xfrm>
+          <a:prstGeom prst="rect">
+            <a:avLst/>
+          </a:prstGeom>
+          <a:noFill/>
+        </p:spPr>
+        <p:txBody>
+          <a:bodyPr wrap="square" lIns="0" rIns="0" tIns="0" bIns="0" anchor="t">
+            <a:normAutofit fontScale="100000" lnSpcReduction="0"/>
+          </a:bodyPr>
+          <a:lstStyle/>
+          <a:p>
+            <a:pPr>
+              <a:spcBef>
+                <a:spcPts val="0"/>
+              </a:spcBef>
+              <a:spcAft>
+                <a:spcPts val="0"/>
+              </a:spcAft>
+              <a:defRPr sz="1000" b="0">
+                <a:solidFill>
+                  <a:srgbClr val="D0002B"/>
+                </a:solidFill>
+                <a:latin typeface="Arial"/>
+              </a:defRPr>
+            </a:pPr>
+            <a:r>
+              <a:rPr sz="1000">
+                <a:solidFill>
+                  <a:srgbClr val="F7F8FC"/>
+                </a:solidFill>
+                <a:latin typeface="Arial"/>
+                <a:hlinkClick r:id="rId9"/>
+              </a:rPr>
+              <a:t>Quiz PDF</a:t>
             </a:r>
           </a:p>
         </p:txBody>
